--- a/assets/pptx/catalog-51.pptx
+++ b/assets/pptx/catalog-51.pptx
@@ -3601,7 +3601,7 @@
                 <a:ea typeface="Ebrima"/>
                 <a:cs typeface="Ebrima"/>
               </a:rPr>
-              <a:t>ለመልካም ሆነልኝ ሆነልኝ (2X)</a:t>
+              <a:t>ለመልካም ሆነልኝ ሆነልኝ 2X</a:t>
             </a:r>
           </a:p>
           <a:p>
@@ -3619,7 +3619,7 @@
                 <a:ea typeface="Ebrima"/>
                 <a:cs typeface="Ebrima"/>
               </a:rPr>
-              <a:t>ለበጎ ሆነልኝ ሆነልኝ (2X)</a:t>
+              <a:t>ለበጎ ሆነልኝ ሆነልኝ 2X</a:t>
             </a:r>
           </a:p>
           <a:p>
